--- a/lecons/LSA/Climatology/LSA_CLIM_L12_Global_Distribution_of_Precipitation.pptx
+++ b/lecons/LSA/Climatology/LSA_CLIM_L12_Global_Distribution_of_Precipitation.pptx
@@ -3022,7 +3022,7 @@
           <a:p>
             <a:r>
               <a:rPr lang="en-US" dirty="0"/>
-              <a:t>Let us copy DEFINITIONS. The key terms of this lesson are defined as follows. Write each point on a new line, with the key term first.</a:t>
+              <a:t>Let us copy the definitions. The key terms of this lesson are defined as follows. On this slide we have Continentality and Insularity. Write each point on a new line, with the key term first, and explain it in your own words when we revise.</a:t>
             </a:r>
             <a:endParaRPr lang="en-US" dirty="0"/>
           </a:p>
@@ -3110,7 +3110,7 @@
           <a:p>
             <a:r>
               <a:rPr lang="en-US" dirty="0"/>
-              <a:t>Let us copy Latitudinal Pattern of Precipitation. Precipitation varies with latitude as follows. Write each point on a new line, with the key term first. When you finish, we go to the next slide.</a:t>
+              <a:t>Let us copy Latitudinal Pattern of Precipitation. Precipitation varies with latitude as follows. On this slide we have Equatorial belt (0–10°). Write each point on a new line, with the key term first, and explain it in your own words when we revise. When you finish, we go to the next slide.</a:t>
             </a:r>
             <a:endParaRPr lang="en-US" dirty="0"/>
           </a:p>
@@ -3198,7 +3198,7 @@
           <a:p>
             <a:r>
               <a:rPr lang="en-US" dirty="0"/>
-              <a:t>We continue with the same part. Write each point on a new line, with the key term first.</a:t>
+              <a:t>We continue with Latitudinal Pattern of Precipitation. On this slide we have Subtropical belts (20–30°) and Mid-latitudes and poles. Write each point on a new line, with the key term first, and explain it in your own words when we revise.</a:t>
             </a:r>
             <a:endParaRPr lang="en-US" dirty="0"/>
           </a:p>
@@ -3374,7 +3374,7 @@
           <a:p>
             <a:r>
               <a:rPr lang="en-US" dirty="0"/>
-              <a:t>Let us copy Primary (Global) Factors. The main factors of global variation are. Write each point on a new line, with the key term first. When you finish, we go to the next slide.</a:t>
+              <a:t>Let us copy Primary (Global) Factors. The main factors of global variation are. On this slide we have Pressure belts. Write each point on a new line, with the key term first, and explain it in your own words when we revise. When you finish, we go to the next slide.</a:t>
             </a:r>
             <a:endParaRPr lang="en-US" dirty="0"/>
           </a:p>
@@ -3550,7 +3550,7 @@
           <a:p>
             <a:r>
               <a:rPr lang="en-US" dirty="0"/>
-              <a:t>We continue with the same part. Write each point on a new line, with the key term first.</a:t>
+              <a:t>We continue with Primary (Global) Factors. On this slide we have Air masses. Write each point on a new line, with the key term first, and explain it in your own words when we revise.</a:t>
             </a:r>
             <a:endParaRPr lang="en-US" dirty="0"/>
           </a:p>
@@ -3726,7 +3726,7 @@
           <a:p>
             <a:r>
               <a:rPr lang="en-US" dirty="0"/>
-              <a:t>Let us copy Secondary (Local) Factors. Local factors also modify precipitation. Write each point on a new line, with the key term first. When you finish, we go to the next slide.</a:t>
+              <a:t>Let us copy Secondary (Local) Factors. Local factors also modify precipitation. On this slide we have Relief. Write each point on a new line, with the key term first, and explain it in your own words when we revise. When you finish, we go to the next slide.</a:t>
             </a:r>
             <a:endParaRPr lang="en-US" dirty="0"/>
           </a:p>
@@ -3814,7 +3814,7 @@
           <a:p>
             <a:r>
               <a:rPr lang="en-US" dirty="0"/>
-              <a:t>We continue with the same part. Write each point on a new line, with the key term first. When you finish, we go to the next slide.</a:t>
+              <a:t>We continue with Secondary (Local) Factors. On this slide we have Distance from the sea. Write each point on a new line, with the key term first, and explain it in your own words when we revise. When you finish, we go to the next slide.</a:t>
             </a:r>
             <a:endParaRPr lang="en-US" dirty="0"/>
           </a:p>
@@ -3902,7 +3902,7 @@
           <a:p>
             <a:r>
               <a:rPr lang="en-US" dirty="0"/>
-              <a:t>We continue with the same part. Write each point on a new line, with the key term first. When you finish, we go to the next slide.</a:t>
+              <a:t>We continue with Secondary (Local) Factors. On this slide we have Ocean currents and water bodies. Write each point on a new line, with the key term first, and explain it in your own words when we revise. When you finish, we go to the next slide.</a:t>
             </a:r>
             <a:endParaRPr lang="en-US" dirty="0"/>
           </a:p>
@@ -3990,7 +3990,7 @@
           <a:p>
             <a:r>
               <a:rPr lang="en-US" dirty="0"/>
-              <a:t>We continue with the same part. Write each point on a new line, with the key term first.</a:t>
+              <a:t>We continue with Secondary (Local) Factors. On this slide we have Vegetation and towns. Write each point on a new line, with the key term first, and explain it in your own words when we revise.</a:t>
             </a:r>
             <a:endParaRPr lang="en-US" dirty="0"/>
           </a:p>
@@ -5222,7 +5222,7 @@
           <a:p>
             <a:r>
               <a:rPr lang="en-US" dirty="0"/>
-              <a:t>Here is the plan of our lesson today. We shall correction of the homework; then objectives and recall; then real-life situation and action to take; then learning activities; then board summary; then evaluation, remediation and homework.</a:t>
+              <a:t>Here is the plan of our lesson today. First, we shall correct the homework. Then we shall look at the objectives and recall what you already know. After that, we shall study a situation from real life and the action to take, and do the learning activities. Finally, we shall copy the board summary, do the evaluation and the remediation, and I will give you the homework.</a:t>
             </a:r>
             <a:endParaRPr lang="en-US" dirty="0"/>
           </a:p>
@@ -6762,7 +6762,7 @@
                 <a:ea typeface="Times New Roman" pitchFamily="34" charset="-122"/>
                 <a:cs typeface="Times New Roman" pitchFamily="34" charset="-120"/>
               </a:rPr>
-              <a:t>Lesson 12: Global Distribution of Precipitation</a:t>
+              <a:t>Lesson 12</a:t>
             </a:r>
             <a:endParaRPr lang="en-US" sz="2600" dirty="0"/>
           </a:p>
